--- a/~sasano/lecture/pn2/26/chukan.pptx
+++ b/~sasano/lecture/pn2/26/chukan.pptx
@@ -308,7 +308,7 @@
             <a:fld id="{E90ED720-0104-4369-84BC-D37694168613}" type="datetimeFigureOut">
               <a:rPr kumimoji="1" lang="ja-JP" altLang="en-US" smtClean="0"/>
               <a:pPr/>
-              <a:t>2024/11/11</a:t>
+              <a:t>2026/9/28</a:t>
             </a:fld>
             <a:endParaRPr kumimoji="1" lang="ja-JP" altLang="en-US"/>
           </a:p>
@@ -505,7 +505,7 @@
             <a:fld id="{E90ED720-0104-4369-84BC-D37694168613}" type="datetimeFigureOut">
               <a:rPr kumimoji="1" lang="ja-JP" altLang="en-US" smtClean="0"/>
               <a:pPr/>
-              <a:t>2024/11/11</a:t>
+              <a:t>2026/9/28</a:t>
             </a:fld>
             <a:endParaRPr kumimoji="1" lang="ja-JP" altLang="en-US"/>
           </a:p>
@@ -712,7 +712,7 @@
             <a:fld id="{E90ED720-0104-4369-84BC-D37694168613}" type="datetimeFigureOut">
               <a:rPr kumimoji="1" lang="ja-JP" altLang="en-US" smtClean="0"/>
               <a:pPr/>
-              <a:t>2024/11/11</a:t>
+              <a:t>2026/9/28</a:t>
             </a:fld>
             <a:endParaRPr kumimoji="1" lang="ja-JP" altLang="en-US"/>
           </a:p>
@@ -909,7 +909,7 @@
             <a:fld id="{E90ED720-0104-4369-84BC-D37694168613}" type="datetimeFigureOut">
               <a:rPr kumimoji="1" lang="ja-JP" altLang="en-US" smtClean="0"/>
               <a:pPr/>
-              <a:t>2024/11/11</a:t>
+              <a:t>2026/9/28</a:t>
             </a:fld>
             <a:endParaRPr kumimoji="1" lang="ja-JP" altLang="en-US"/>
           </a:p>
@@ -1151,7 +1151,7 @@
             <a:fld id="{E90ED720-0104-4369-84BC-D37694168613}" type="datetimeFigureOut">
               <a:rPr kumimoji="1" lang="ja-JP" altLang="en-US" smtClean="0"/>
               <a:pPr/>
-              <a:t>2024/11/11</a:t>
+              <a:t>2026/9/28</a:t>
             </a:fld>
             <a:endParaRPr kumimoji="1" lang="ja-JP" altLang="en-US"/>
           </a:p>
@@ -1497,7 +1497,7 @@
             <a:fld id="{E90ED720-0104-4369-84BC-D37694168613}" type="datetimeFigureOut">
               <a:rPr kumimoji="1" lang="ja-JP" altLang="en-US" smtClean="0"/>
               <a:pPr/>
-              <a:t>2024/11/11</a:t>
+              <a:t>2026/9/28</a:t>
             </a:fld>
             <a:endParaRPr kumimoji="1" lang="ja-JP" altLang="en-US"/>
           </a:p>
@@ -1977,7 +1977,7 @@
             <a:fld id="{E90ED720-0104-4369-84BC-D37694168613}" type="datetimeFigureOut">
               <a:rPr kumimoji="1" lang="ja-JP" altLang="en-US" smtClean="0"/>
               <a:pPr/>
-              <a:t>2024/11/11</a:t>
+              <a:t>2026/9/28</a:t>
             </a:fld>
             <a:endParaRPr kumimoji="1" lang="ja-JP" altLang="en-US"/>
           </a:p>
@@ -2091,7 +2091,7 @@
             <a:fld id="{E90ED720-0104-4369-84BC-D37694168613}" type="datetimeFigureOut">
               <a:rPr kumimoji="1" lang="ja-JP" altLang="en-US" smtClean="0"/>
               <a:pPr/>
-              <a:t>2024/11/11</a:t>
+              <a:t>2026/9/28</a:t>
             </a:fld>
             <a:endParaRPr kumimoji="1" lang="ja-JP" altLang="en-US"/>
           </a:p>
@@ -2183,7 +2183,7 @@
             <a:fld id="{E90ED720-0104-4369-84BC-D37694168613}" type="datetimeFigureOut">
               <a:rPr kumimoji="1" lang="ja-JP" altLang="en-US" smtClean="0"/>
               <a:pPr/>
-              <a:t>2024/11/11</a:t>
+              <a:t>2026/9/28</a:t>
             </a:fld>
             <a:endParaRPr kumimoji="1" lang="ja-JP" altLang="en-US"/>
           </a:p>
@@ -2487,7 +2487,7 @@
             <a:fld id="{E90ED720-0104-4369-84BC-D37694168613}" type="datetimeFigureOut">
               <a:rPr kumimoji="1" lang="ja-JP" altLang="en-US" smtClean="0"/>
               <a:pPr/>
-              <a:t>2024/11/11</a:t>
+              <a:t>2026/9/28</a:t>
             </a:fld>
             <a:endParaRPr kumimoji="1" lang="ja-JP" altLang="en-US"/>
           </a:p>
@@ -2736,7 +2736,7 @@
             <a:fld id="{E90ED720-0104-4369-84BC-D37694168613}" type="datetimeFigureOut">
               <a:rPr kumimoji="1" lang="ja-JP" altLang="en-US" smtClean="0"/>
               <a:pPr/>
-              <a:t>2024/11/11</a:t>
+              <a:t>2026/9/28</a:t>
             </a:fld>
             <a:endParaRPr kumimoji="1" lang="ja-JP" altLang="en-US"/>
           </a:p>
@@ -2976,7 +2976,7 @@
             <a:fld id="{E90ED720-0104-4369-84BC-D37694168613}" type="datetimeFigureOut">
               <a:rPr kumimoji="1" lang="ja-JP" altLang="en-US" smtClean="0"/>
               <a:pPr/>
-              <a:t>2024/11/11</a:t>
+              <a:t>2026/9/28</a:t>
             </a:fld>
             <a:endParaRPr kumimoji="1" lang="ja-JP" altLang="en-US"/>
           </a:p>
@@ -3399,8 +3399,8 @@
         </p:nvSpPr>
         <p:spPr>
           <a:xfrm>
-            <a:off x="2751570" y="4977482"/>
-            <a:ext cx="3534942" cy="523220"/>
+            <a:off x="3821634" y="4869160"/>
+            <a:ext cx="1500732" cy="523220"/>
           </a:xfrm>
           <a:prstGeom prst="rect">
             <a:avLst/>
@@ -3413,9 +3413,14 @@
           </a:bodyPr>
           <a:lstStyle/>
           <a:p>
+            <a:pPr algn="ctr"/>
+            <a:r>
+              <a:rPr kumimoji="1" lang="ja-JP" altLang="en-US" sz="2800"/>
+              <a:t>篠埜　</a:t>
+            </a:r>
             <a:r>
               <a:rPr kumimoji="1" lang="ja-JP" altLang="en-US" sz="2800" dirty="0"/>
-              <a:t>情報工学科　篠埜　功</a:t>
+              <a:t>功</a:t>
             </a:r>
           </a:p>
         </p:txBody>

--- a/~sasano/lecture/pn2/26/chukan.pptx
+++ b/~sasano/lecture/pn2/26/chukan.pptx
@@ -308,7 +308,7 @@
             <a:fld id="{E90ED720-0104-4369-84BC-D37694168613}" type="datetimeFigureOut">
               <a:rPr kumimoji="1" lang="ja-JP" altLang="en-US" smtClean="0"/>
               <a:pPr/>
-              <a:t>2026/9/28</a:t>
+              <a:t>2026/10/27</a:t>
             </a:fld>
             <a:endParaRPr kumimoji="1" lang="ja-JP" altLang="en-US"/>
           </a:p>
@@ -505,7 +505,7 @@
             <a:fld id="{E90ED720-0104-4369-84BC-D37694168613}" type="datetimeFigureOut">
               <a:rPr kumimoji="1" lang="ja-JP" altLang="en-US" smtClean="0"/>
               <a:pPr/>
-              <a:t>2026/9/28</a:t>
+              <a:t>2026/10/27</a:t>
             </a:fld>
             <a:endParaRPr kumimoji="1" lang="ja-JP" altLang="en-US"/>
           </a:p>
@@ -712,7 +712,7 @@
             <a:fld id="{E90ED720-0104-4369-84BC-D37694168613}" type="datetimeFigureOut">
               <a:rPr kumimoji="1" lang="ja-JP" altLang="en-US" smtClean="0"/>
               <a:pPr/>
-              <a:t>2026/9/28</a:t>
+              <a:t>2026/10/27</a:t>
             </a:fld>
             <a:endParaRPr kumimoji="1" lang="ja-JP" altLang="en-US"/>
           </a:p>
@@ -909,7 +909,7 @@
             <a:fld id="{E90ED720-0104-4369-84BC-D37694168613}" type="datetimeFigureOut">
               <a:rPr kumimoji="1" lang="ja-JP" altLang="en-US" smtClean="0"/>
               <a:pPr/>
-              <a:t>2026/9/28</a:t>
+              <a:t>2026/10/27</a:t>
             </a:fld>
             <a:endParaRPr kumimoji="1" lang="ja-JP" altLang="en-US"/>
           </a:p>
@@ -1151,7 +1151,7 @@
             <a:fld id="{E90ED720-0104-4369-84BC-D37694168613}" type="datetimeFigureOut">
               <a:rPr kumimoji="1" lang="ja-JP" altLang="en-US" smtClean="0"/>
               <a:pPr/>
-              <a:t>2026/9/28</a:t>
+              <a:t>2026/10/27</a:t>
             </a:fld>
             <a:endParaRPr kumimoji="1" lang="ja-JP" altLang="en-US"/>
           </a:p>
@@ -1497,7 +1497,7 @@
             <a:fld id="{E90ED720-0104-4369-84BC-D37694168613}" type="datetimeFigureOut">
               <a:rPr kumimoji="1" lang="ja-JP" altLang="en-US" smtClean="0"/>
               <a:pPr/>
-              <a:t>2026/9/28</a:t>
+              <a:t>2026/10/27</a:t>
             </a:fld>
             <a:endParaRPr kumimoji="1" lang="ja-JP" altLang="en-US"/>
           </a:p>
@@ -1977,7 +1977,7 @@
             <a:fld id="{E90ED720-0104-4369-84BC-D37694168613}" type="datetimeFigureOut">
               <a:rPr kumimoji="1" lang="ja-JP" altLang="en-US" smtClean="0"/>
               <a:pPr/>
-              <a:t>2026/9/28</a:t>
+              <a:t>2026/10/27</a:t>
             </a:fld>
             <a:endParaRPr kumimoji="1" lang="ja-JP" altLang="en-US"/>
           </a:p>
@@ -2091,7 +2091,7 @@
             <a:fld id="{E90ED720-0104-4369-84BC-D37694168613}" type="datetimeFigureOut">
               <a:rPr kumimoji="1" lang="ja-JP" altLang="en-US" smtClean="0"/>
               <a:pPr/>
-              <a:t>2026/9/28</a:t>
+              <a:t>2026/10/27</a:t>
             </a:fld>
             <a:endParaRPr kumimoji="1" lang="ja-JP" altLang="en-US"/>
           </a:p>
@@ -2183,7 +2183,7 @@
             <a:fld id="{E90ED720-0104-4369-84BC-D37694168613}" type="datetimeFigureOut">
               <a:rPr kumimoji="1" lang="ja-JP" altLang="en-US" smtClean="0"/>
               <a:pPr/>
-              <a:t>2026/9/28</a:t>
+              <a:t>2026/10/27</a:t>
             </a:fld>
             <a:endParaRPr kumimoji="1" lang="ja-JP" altLang="en-US"/>
           </a:p>
@@ -2487,7 +2487,7 @@
             <a:fld id="{E90ED720-0104-4369-84BC-D37694168613}" type="datetimeFigureOut">
               <a:rPr kumimoji="1" lang="ja-JP" altLang="en-US" smtClean="0"/>
               <a:pPr/>
-              <a:t>2026/9/28</a:t>
+              <a:t>2026/10/27</a:t>
             </a:fld>
             <a:endParaRPr kumimoji="1" lang="ja-JP" altLang="en-US"/>
           </a:p>
@@ -2736,7 +2736,7 @@
             <a:fld id="{E90ED720-0104-4369-84BC-D37694168613}" type="datetimeFigureOut">
               <a:rPr kumimoji="1" lang="ja-JP" altLang="en-US" smtClean="0"/>
               <a:pPr/>
-              <a:t>2026/9/28</a:t>
+              <a:t>2026/10/27</a:t>
             </a:fld>
             <a:endParaRPr kumimoji="1" lang="ja-JP" altLang="en-US"/>
           </a:p>
@@ -2976,7 +2976,7 @@
             <a:fld id="{E90ED720-0104-4369-84BC-D37694168613}" type="datetimeFigureOut">
               <a:rPr kumimoji="1" lang="ja-JP" altLang="en-US" smtClean="0"/>
               <a:pPr/>
-              <a:t>2026/9/28</a:t>
+              <a:t>2026/10/27</a:t>
             </a:fld>
             <a:endParaRPr kumimoji="1" lang="ja-JP" altLang="en-US"/>
           </a:p>
@@ -3496,7 +3496,7 @@
           <a:p>
             <a:r>
               <a:rPr lang="ja-JP" altLang="en-US"/>
-              <a:t>普段の演習室で試験を行います。授業の座席表の通り着席してください。コロナ陽性、濃厚接触者、インフルエンザ等の場合、オンライン受講申請システムに記入したのち</a:t>
+              <a:t>普段の演習室で試験を行います。授業の座席表の通り着席してください。コロナ陽性、濃厚接触者、インフルエンザ等の場合、篠埜に連絡したのち</a:t>
             </a:r>
             <a:r>
               <a:rPr lang="en-US" altLang="ja-JP" dirty="0"/>
@@ -3545,15 +3545,7 @@
           <a:p>
             <a:r>
               <a:rPr lang="ja-JP" altLang="en-US"/>
-              <a:t>資料参照可とします。</a:t>
-            </a:r>
-            <a:r>
-              <a:rPr lang="en-US" altLang="ja-JP" dirty="0" err="1"/>
-              <a:t>Powerpoint</a:t>
-            </a:r>
-            <a:r>
-              <a:rPr lang="ja-JP" altLang="en-US"/>
-              <a:t>のスライド、自分のプログラムやメモなどは見て構いません。エディタやコンパイラを使っても構いません。ただし、他の人の回答を見たり、他の人と話をしたり、他の人とメールや</a:t>
+              <a:t>資料参照可とします。授業のスライド、自分のプログラムやメモなどは見て構いません。エディタやコンパイラを使っても構いません。ただし、他の人の回答を見たり、他の人と話をしたり、他の人とメールや</a:t>
             </a:r>
             <a:r>
               <a:rPr lang="en-US" altLang="ja-JP" dirty="0"/>
